--- a/assets/pptx/catalog-709.pptx
+++ b/assets/pptx/catalog-709.pptx
@@ -3351,7 +3351,7 @@
                 <a:ea typeface="Ebrima"/>
                 <a:cs typeface="Ebrima"/>
               </a:rPr>
-              <a:t>(2x)</a:t>
+              <a:t>2x</a:t>
             </a:r>
           </a:p>
         </p:txBody>
@@ -3619,7 +3619,7 @@
                 <a:ea typeface="Ebrima"/>
                 <a:cs typeface="Ebrima"/>
               </a:rPr>
-              <a:t>አቤት ዕውቀትህ ስራህ ሊወራልውህ/ሊነገርልህ ይገባህ (2x)</a:t>
+              <a:t>አቤት ዕውቀትህ ስራህ ሊወራልውህ/ሊነገርልህ ይገባህ 2x</a:t>
             </a:r>
           </a:p>
         </p:txBody>
@@ -3753,7 +3753,7 @@
                 <a:ea typeface="Ebrima"/>
                 <a:cs typeface="Ebrima"/>
               </a:rPr>
-              <a:t>(4x)</a:t>
+              <a:t>4x</a:t>
             </a:r>
           </a:p>
         </p:txBody>
@@ -4088,7 +4088,7 @@
                 <a:ea typeface="Ebrima"/>
                 <a:cs typeface="Ebrima"/>
               </a:rPr>
-              <a:t>(2x)</a:t>
+              <a:t>2x</a:t>
             </a:r>
           </a:p>
         </p:txBody>
@@ -4356,7 +4356,7 @@
                 <a:ea typeface="Ebrima"/>
                 <a:cs typeface="Ebrima"/>
               </a:rPr>
-              <a:t>አቤት ዕውቀትህ ስራህ ሊወራልውህ/ሊነገርልህ ይገባህ (2x)</a:t>
+              <a:t>አቤት ዕውቀትህ ስራህ ሊወራልውህ/ሊነገርልህ ይገባህ 2x</a:t>
             </a:r>
           </a:p>
         </p:txBody>
@@ -4490,7 +4490,7 @@
                 <a:ea typeface="Ebrima"/>
                 <a:cs typeface="Ebrima"/>
               </a:rPr>
-              <a:t>(4x)</a:t>
+              <a:t>4x</a:t>
             </a:r>
           </a:p>
         </p:txBody>
@@ -4825,7 +4825,7 @@
                 <a:ea typeface="Ebrima"/>
                 <a:cs typeface="Ebrima"/>
               </a:rPr>
-              <a:t>(2x)</a:t>
+              <a:t>2x</a:t>
             </a:r>
           </a:p>
         </p:txBody>
@@ -5093,7 +5093,7 @@
                 <a:ea typeface="Ebrima"/>
                 <a:cs typeface="Ebrima"/>
               </a:rPr>
-              <a:t>አቤት ዕውቀትህ ስራህ ሊወራልውህ/ሊነገርልህ ይገባህ (2x)</a:t>
+              <a:t>አቤት ዕውቀትህ ስራህ ሊወራልውህ/ሊነገርልህ ይገባህ 2x</a:t>
             </a:r>
           </a:p>
         </p:txBody>
@@ -5227,7 +5227,7 @@
                 <a:ea typeface="Ebrima"/>
                 <a:cs typeface="Ebrima"/>
               </a:rPr>
-              <a:t>(4x)</a:t>
+              <a:t>4x</a:t>
             </a:r>
           </a:p>
         </p:txBody>
@@ -5562,7 +5562,7 @@
                 <a:ea typeface="Ebrima"/>
                 <a:cs typeface="Ebrima"/>
               </a:rPr>
-              <a:t>(2x)</a:t>
+              <a:t>2x</a:t>
             </a:r>
           </a:p>
         </p:txBody>
@@ -5830,7 +5830,7 @@
                 <a:ea typeface="Ebrima"/>
                 <a:cs typeface="Ebrima"/>
               </a:rPr>
-              <a:t>አቤት ዕውቀትህ ስራህ ሊወራልውህ/ሊነገርልህ ይገባህ (2x)</a:t>
+              <a:t>አቤት ዕውቀትህ ስራህ ሊወራልውህ/ሊነገርልህ ይገባህ 2x</a:t>
             </a:r>
           </a:p>
         </p:txBody>
@@ -5897,7 +5897,7 @@
                 <a:ea typeface="Ebrima"/>
                 <a:cs typeface="Ebrima"/>
               </a:rPr>
-              <a:t>አቤት ዕውቀትህ ስራህ ሊወራልውህ/ሊነገርልህ ይገባህ (2x)</a:t>
+              <a:t>አቤት ዕውቀትህ ስራህ ሊወራልውህ/ሊነገርልህ ይገባህ 2x</a:t>
             </a:r>
           </a:p>
         </p:txBody>
@@ -6031,7 +6031,7 @@
                 <a:ea typeface="Ebrima"/>
                 <a:cs typeface="Ebrima"/>
               </a:rPr>
-              <a:t>(4x)</a:t>
+              <a:t>4x</a:t>
             </a:r>
           </a:p>
         </p:txBody>
